--- a/neural_autoskinning_insight_2026.pptx
+++ b/neural_autoskinning_insight_2026.pptx
@@ -4172,7 +4172,7 @@
               </a:defRPr>
             </a:pPr>
             <a:r>
-              <a:t>▸ 虚拟人市场 CAGR 40%+ (IDC 2025)</a:t>
+              <a:t>▸ 虚拟人市场 CAGR 40%+ (Grand View Research 2025)</a:t>
             </a:r>
           </a:p>
           <a:p>
@@ -4499,7 +4499,7 @@
               </a:defRPr>
             </a:pPr>
             <a:r>
-              <a:t>▸ 价值: 电商转化率提升 40%+ (实测数据)</a:t>
+              <a:t>▸ 价值: 3D展示可提升电商转化率 (行业估算)</a:t>
             </a:r>
           </a:p>
         </p:txBody>
@@ -4778,7 +4778,7 @@
               </a:defRPr>
             </a:pPr>
             <a:r>
-              <a:t>▸ 华为 XR 设备: 手势/眼动驱动虚拟形象</a:t>
+              <a:t>▸ 华为 VR Glass: 体感交互驱动虚拟形象</a:t>
             </a:r>
           </a:p>
           <a:p>
@@ -4810,7 +4810,7 @@
               </a:defRPr>
             </a:pPr>
             <a:r>
-              <a:t>▸ 价值: XR 内容生产成本降低 80%</a:t>
+              <a:t>▸ 价值: XR 内容生产成本大幅降低 (AI辅助估算)</a:t>
             </a:r>
           </a:p>
         </p:txBody>
@@ -6372,7 +6372,7 @@
               </a:defRPr>
             </a:pPr>
             <a:r>
-              <a:t>ArkUI 3D | Auto-Rigging API | Animation API | Scene Graph</a:t>
+              <a:t>ArkUI 3D 组件(Component3D) | Auto-Rigging API | Animation API | Scene Graph</a:t>
             </a:r>
           </a:p>
         </p:txBody>
@@ -8054,7 +8054,7 @@
               </a:defRPr>
             </a:pPr>
             <a:r>
-              <a:t>鸿蒙 XR 设备</a:t>
+              <a:t>鸿蒙 XR/VR</a:t>
             </a:r>
           </a:p>
         </p:txBody>
@@ -8093,7 +8093,7 @@
               </a:defRPr>
             </a:pPr>
             <a:r>
-              <a:t>华为 XR 设备中的 3D 角色快速创建，手势/眼动驱动</a:t>
+              <a:t>华为 VR Glass 等设备中的 3D 角色创建，体感交互驱动</a:t>
             </a:r>
           </a:p>
         </p:txBody>
@@ -11926,7 +11926,7 @@
               </a:defRPr>
             </a:pPr>
             <a:r>
-              <a:t>Unity</a:t>
+              <a:t>Reallusion</a:t>
             </a:r>
           </a:p>
         </p:txBody>
@@ -12008,7 +12008,7 @@
               </a:defRPr>
             </a:pPr>
             <a:r>
-              <a:t>AccuRIG</a:t>
+              <a:t>AccuRIG (CC4/CC5)</a:t>
             </a:r>
           </a:p>
         </p:txBody>
@@ -12172,7 +12172,7 @@
               </a:defRPr>
             </a:pPr>
             <a:r>
-              <a:t>内置</a:t>
+              <a:t>商业</a:t>
             </a:r>
           </a:p>
         </p:txBody>
@@ -13456,7 +13456,7 @@
               </a:defRPr>
             </a:pPr>
             <a:r>
-              <a:t>本地推理 3-8秒</a:t>
+              <a:t>本地推理 (预估3-8秒)</a:t>
             </a:r>
           </a:p>
           <a:p>
@@ -13999,7 +13999,7 @@
               </a:defRPr>
             </a:pPr>
             <a:r>
-              <a:t>截至2026Q1</a:t>
+              <a:t>鸿蒙生态 2025年公开数据</a:t>
             </a:r>
           </a:p>
           <a:p>
@@ -14015,7 +14015,7 @@
               </a:defRPr>
             </a:pPr>
             <a:r>
-              <a:t>海量用户基础</a:t>
+              <a:t>华为官方披露</a:t>
             </a:r>
           </a:p>
         </p:txBody>
@@ -18520,7 +18520,7 @@
               </a:defRPr>
             </a:pPr>
             <a:r>
-              <a:t>▸ 鸿蒙端侧预估: 3-8秒 (Mate 70 NPU)</a:t>
+              <a:t>▸ 鸿蒙端侧预估: 3-8秒 (Mate 70 NPU, 预估值)</a:t>
             </a:r>
           </a:p>
           <a:p>
@@ -18535,6 +18535,9 @@
                 <a:latin typeface="Microsoft YaHei"/>
               </a:defRPr>
             </a:pPr>
+            <a:r>
+              <a:t>▸ Blender 内置: 实时 (传统方法)</a:t>
+            </a:r>
           </a:p>
           <a:p>
             <a:pPr>
@@ -18548,9 +18551,6 @@
                 <a:latin typeface="Microsoft YaHei"/>
               </a:defRPr>
             </a:pPr>
-            <a:r>
-              <a:t>注: 鸿蒙端侧数据为模型量化后预估</a:t>
-            </a:r>
           </a:p>
           <a:p>
             <a:pPr>
@@ -18565,7 +18565,23 @@
               </a:defRPr>
             </a:pPr>
             <a:r>
-              <a:t>实际需 POC 验证 (取决于模型+芯片)</a:t>
+              <a:t>注: 鸿蒙端侧数据为模型量化后的工程预估</a:t>
+            </a:r>
+          </a:p>
+          <a:p>
+            <a:pPr>
+              <a:spcBef>
+                <a:spcPts val="500"/>
+              </a:spcBef>
+              <a:defRPr sz="1300" b="0">
+                <a:solidFill>
+                  <a:srgbClr val="C8D0E0"/>
+                </a:solidFill>
+                <a:latin typeface="Microsoft YaHei"/>
+              </a:defRPr>
+            </a:pPr>
+            <a:r>
+              <a:t>实际性能需 POC 实测验证 (取决于模型+芯片型号)</a:t>
             </a:r>
           </a:p>
         </p:txBody>
@@ -18778,7 +18794,7 @@
               </a:defRPr>
             </a:pPr>
             <a:r>
-              <a:t>▸ Objaverse-XL: 800K+ (需筛选有rig的)</a:t>
+              <a:t>▸ Objaverse-XL: 10M+ 3D models (需筛选有rig的子集)</a:t>
             </a:r>
           </a:p>
           <a:p>
@@ -18946,7 +18962,7 @@
               </a:defRPr>
             </a:pPr>
             <a:r>
-              <a:t>▸ NeuroSkinning (2018) 使用体素化卷积网络，非严格 GCN；但作为首批深度学习蒙皮方案具有里程碑意义</a:t>
+              <a:t>▸ NeuroSkinning (2018) 论文标题明确使用 'Graph Convolution Network'，发表于 ACM TOG / SIGGRAPH Asia</a:t>
             </a:r>
           </a:p>
           <a:p>
@@ -18962,7 +18978,7 @@
               </a:defRPr>
             </a:pPr>
             <a:r>
-              <a:t>▸ Objaverse 800K+ 中大部分为非铰接物体（家具/工具等），实际可用于 rig 训练的子集远小于总量</a:t>
+              <a:t>▸ Bounded Biharmonic Weights (2011) 使用双调和方程 (Biharmonic)，非热方程 (Heat Equation)</a:t>
             </a:r>
           </a:p>
           <a:p>
@@ -18978,7 +18994,39 @@
               </a:defRPr>
             </a:pPr>
             <a:r>
-              <a:t>▸ 端侧 NPU 对 Transformer 自定义算子（如 cross-attention）支持尚不完善，需 MindSpore Lite 算子适配</a:t>
+              <a:t>▸ SkinTokens/TokenRig 目前为 arXiv 预印本 (2026年2月)，尚未经同行评审正式发表</a:t>
+            </a:r>
+          </a:p>
+          <a:p>
+            <a:pPr>
+              <a:spcBef>
+                <a:spcPts val="500"/>
+              </a:spcBef>
+              <a:defRPr sz="1000" b="0">
+                <a:solidFill>
+                  <a:srgbClr val="C8D0E0"/>
+                </a:solidFill>
+                <a:latin typeface="Microsoft YaHei"/>
+              </a:defRPr>
+            </a:pPr>
+            <a:r>
+              <a:t>▸ Objaverse 800K+ 中大部分为非铰接物体（家具/工具等），实际可用于 rig 训练的子集远小于总量</a:t>
+            </a:r>
+          </a:p>
+          <a:p>
+            <a:pPr>
+              <a:spcBef>
+                <a:spcPts val="500"/>
+              </a:spcBef>
+              <a:defRPr sz="1000" b="0">
+                <a:solidFill>
+                  <a:srgbClr val="C8D0E0"/>
+                </a:solidFill>
+                <a:latin typeface="Microsoft YaHei"/>
+              </a:defRPr>
+            </a:pPr>
+            <a:r>
+              <a:t>▸ 华为目前无独立 XR 头显产品，仅推出手机端 VR Glass (2019/2022)，PPT中的'鸿蒙XR'场景为前瞻性展望</a:t>
             </a:r>
           </a:p>
         </p:txBody>
@@ -20103,7 +20151,7 @@
               </a:defRPr>
             </a:pPr>
             <a:r>
-              <a:t>数据来源: SIGGRAPH 2025 论文 / VAST-AI-Research GitHub / IDC 2025 3D Content Market Report</a:t>
+              <a:t>数据来源: SIGGRAPH 2025 论文 / VAST-AI-Research GitHub / MRFR &amp; Grand View Research 2025</a:t>
             </a:r>
           </a:p>
         </p:txBody>
@@ -20365,7 +20413,7 @@
               </a:defRPr>
             </a:pPr>
             <a:r>
-              <a:t>[2] Heat Skinner (Jacobson et al., SIGGRAPH 2011)</a:t>
+              <a:t>[2] Bounded Biharmonic Weights (Jacobson et al., SIGGRAPH 2011)</a:t>
             </a:r>
           </a:p>
           <a:p>
@@ -20381,7 +20429,7 @@
               </a:defRPr>
             </a:pPr>
             <a:r>
-              <a:t>[3] NeuroSkinning (Wang et al., EG/CGF 2018)</a:t>
+              <a:t>[3] NeuroSkinning (Wang et al., ACM TOG / SIG Asia 2018)</a:t>
             </a:r>
           </a:p>
           <a:p>
@@ -20413,7 +20461,7 @@
               </a:defRPr>
             </a:pPr>
             <a:r>
-              <a:t>[5] SkinningNet (Daviet et al., CGF 2021)</a:t>
+              <a:t>[5] SkinningNet (CGF 2021) — 待进一步核实</a:t>
             </a:r>
           </a:p>
           <a:p>
@@ -20429,7 +20477,7 @@
               </a:defRPr>
             </a:pPr>
             <a:r>
-              <a:t>[6] Puppeteer (Adobe, SIGGRAPH Asia 2023)</a:t>
+              <a:t>[6] Puppeteer (SIGGRAPH Asia 2023) — 学术方法</a:t>
             </a:r>
           </a:p>
           <a:p>
@@ -20525,7 +20573,7 @@
               </a:defRPr>
             </a:pPr>
             <a:r>
-              <a:t>    arXiv:2602.04805</a:t>
+              <a:t>    arXiv:2602.04805 (预印本, 待正式发表)</a:t>
             </a:r>
           </a:p>
           <a:p>
@@ -20869,7 +20917,7 @@
               </a:defRPr>
             </a:pPr>
             <a:r>
-              <a:t>▸ readyplayer.me</a:t>
+              <a:t>▸ readyplayer.me (已被Netflix收购, 2026年关停)</a:t>
             </a:r>
           </a:p>
           <a:p>
@@ -20943,7 +20991,7 @@
               </a:defRPr>
             </a:pPr>
             <a:r>
-              <a:t>▸ IDC Worldwide 3D Content Creation</a:t>
+              <a:t>▸ MRFR: 3D Digital Asset Market Report 2025</a:t>
             </a:r>
           </a:p>
           <a:p>
@@ -20959,7 +21007,7 @@
               </a:defRPr>
             </a:pPr>
             <a:r>
-              <a:t>  Market Forecast 2025</a:t>
+              <a:t>▸ Grand View Research: Virtual Human Market 2025</a:t>
             </a:r>
           </a:p>
           <a:p>
@@ -20975,7 +21023,7 @@
               </a:defRPr>
             </a:pPr>
             <a:r>
-              <a:t>▸ Gartner Emerging Tech Trends 2025</a:t>
+              <a:t>▸ 虚拟人 CAGR 40%+: Grand View Research 2025</a:t>
             </a:r>
           </a:p>
         </p:txBody>
@@ -21387,7 +21435,7 @@
               </a:defRPr>
             </a:pPr>
             <a:r>
-              <a:t>全球3D内容创作市场 (IDC 2025)</a:t>
+              <a:t>全球3D数字资产市场 (MRFR/Grand View Research 2025)</a:t>
             </a:r>
           </a:p>
         </p:txBody>
@@ -24015,7 +24063,7 @@
               </a:defRPr>
             </a:pPr>
             <a:r>
-              <a:t>Heat Skinner</a:t>
+              <a:t>Bounded Biharmonic</a:t>
             </a:r>
           </a:p>
         </p:txBody>
@@ -24051,7 +24099,11 @@
               </a:defRPr>
             </a:pPr>
             <a:r>
-              <a:t>SIGGRAPH · 基于热方程的蒙皮权重，至今仍是工业基线</a:t>
+              <a:t>SIGGRAPH · 双调和权重 (BBW)</a:t>
+            </a:r>
+            <a:br/>
+            <a:r>
+              <a:t>蒙皮权重工业基线方法</a:t>
             </a:r>
           </a:p>
         </p:txBody>
@@ -24283,7 +24335,7 @@
               </a:defRPr>
             </a:pPr>
             <a:r>
-              <a:t>EG/CGF</a:t>
+              <a:t>SIG Asia</a:t>
             </a:r>
           </a:p>
         </p:txBody>
@@ -24319,11 +24371,11 @@
               </a:defRPr>
             </a:pPr>
             <a:r>
-              <a:t>首批深度学习</a:t>
+              <a:t>GCN 蒙皮权重预测</a:t>
             </a:r>
             <a:br/>
             <a:r>
-              <a:t>蒙皮权重预测</a:t>
+              <a:t>首批深度学习方案</a:t>
             </a:r>
           </a:p>
         </p:txBody>
@@ -24703,11 +24755,11 @@
               </a:defRPr>
             </a:pPr>
             <a:r>
-              <a:t>Adobe 工业级方案</a:t>
+              <a:t>学术自动绑骨方案</a:t>
             </a:r>
             <a:br/>
             <a:r>
-              <a:t>Mixamo 部署</a:t>
+              <a:t>与商业方法对比</a:t>
             </a:r>
           </a:p>
         </p:txBody>
@@ -25709,7 +25761,7 @@
               </a:defRPr>
             </a:pPr>
             <a:r>
-              <a:t>Puppeteer</a:t>
+              <a:t>Auto-Rigger</a:t>
             </a:r>
           </a:p>
           <a:p>
@@ -25851,7 +25903,7 @@
               </a:defRPr>
             </a:pPr>
             <a:r>
-              <a:t>Unity</a:t>
+              <a:t>Reallusion AccuRIG</a:t>
             </a:r>
           </a:p>
         </p:txBody>
@@ -25890,7 +25942,7 @@
               </a:defRPr>
             </a:pPr>
             <a:r>
-              <a:t>AccuRIG</a:t>
+              <a:t>CC4/CC5 内置自动绑骨</a:t>
             </a:r>
           </a:p>
           <a:p>
@@ -25906,7 +25958,7 @@
               </a:defRPr>
             </a:pPr>
             <a:r>
-              <a:t>内置自动绑骨 · 人形为主</a:t>
+              <a:t>人形为主 · 付费</a:t>
             </a:r>
           </a:p>
         </p:txBody>
@@ -28093,7 +28145,7 @@
               </a:defRPr>
             </a:pPr>
             <a:r>
-              <a:t>RigNet (~2,700) · Rig-XL (14,000+) · VRoid Hub · Objaverse-XL (800K+,需筛选) · Articulation-XL 2.0</a:t>
+              <a:t>RigNet (~2,700) · Rig-XL (14,000+) · VRoid Hub · Objaverse-XL (10M+,需筛选) · Articulation-XL 2.0</a:t>
             </a:r>
           </a:p>
         </p:txBody>
@@ -28713,7 +28765,7 @@
               </a:defRPr>
             </a:pPr>
             <a:r>
-              <a:t>▸ UCSD + Adobe Research</a:t>
+              <a:t>▸ UCSD + Adobe Research + Hillbot Inc.</a:t>
             </a:r>
           </a:p>
           <a:p>
